--- a/02-lecture-git-advanced/slides/02-c-remote.pptx
+++ b/02-lecture-git-advanced/slides/02-c-remote.pptx
@@ -233,7 +233,7 @@
           </a:lstStyle>
           <a:p>
             <a:fld id="{6B8D1B20-A248-FB47-8240-73C0C5F47C9D}" type="datetimeFigureOut">
-              <a:t>2026/3/1</a:t>
+              <a:t>2026/3/9</a:t>
             </a:fld>
             <a:endParaRPr kumimoji="1" lang="ja-JP" altLang="en-US"/>
           </a:p>
